--- a/assets/pptx/catalog-468.pptx
+++ b/assets/pptx/catalog-468.pptx
@@ -3353,7 +3353,7 @@
                 <a:ea typeface="Ebrima"/>
                 <a:cs typeface="Ebrima"/>
               </a:rPr>
-              <a:t>አመሰግናለሁ (2x)</a:t>
+              <a:t>አመሰግናለሁ 2x</a:t>
             </a:r>
           </a:p>
         </p:txBody>
@@ -3541,7 +3541,7 @@
                 <a:ea typeface="Ebrima"/>
                 <a:cs typeface="Ebrima"/>
               </a:rPr>
-              <a:t>- ማስረሺያዬ (3x) ማስረሺያዬ (3x)</a:t>
+              <a:t>- ማስረሺያዬ 3x ማስረሺያዬ 3x</a:t>
             </a:r>
           </a:p>
           <a:p>
@@ -3559,7 +3559,7 @@
                 <a:ea typeface="Ebrima"/>
                 <a:cs typeface="Ebrima"/>
               </a:rPr>
-              <a:t>ማስረሺያዬ (4x)</a:t>
+              <a:t>ማስረሺያዬ 4x</a:t>
             </a:r>
           </a:p>
         </p:txBody>
@@ -3662,7 +3662,7 @@
                 <a:ea typeface="Ebrima"/>
                 <a:cs typeface="Ebrima"/>
               </a:rPr>
-              <a:t>ማን ልበለው ኧረ ማን (2x)</a:t>
+              <a:t>ማን ልበለው ኧረ ማን 2x</a:t>
             </a:r>
           </a:p>
           <a:p>
@@ -3680,7 +3680,7 @@
                 <a:ea typeface="Ebrima"/>
                 <a:cs typeface="Ebrima"/>
               </a:rPr>
-              <a:t>ኧረ ማን ልበለው ኧረ ማን (2x)</a:t>
+              <a:t>ኧረ ማን ልበለው ኧረ ማን 2x</a:t>
             </a:r>
           </a:p>
         </p:txBody>
@@ -3886,7 +3886,7 @@
                 <a:ea typeface="Ebrima"/>
                 <a:cs typeface="Ebrima"/>
               </a:rPr>
-              <a:t>ጉድጓዱን አሻገረኝ (2x)</a:t>
+              <a:t>ጉድጓዱን አሻገረኝ 2x</a:t>
             </a:r>
           </a:p>
         </p:txBody>
@@ -3989,7 +3989,7 @@
                 <a:ea typeface="Ebrima"/>
                 <a:cs typeface="Ebrima"/>
               </a:rPr>
-              <a:t>ከትልልቅ ሰዎች ጋራ አደባለከኝ (2x)</a:t>
+              <a:t>ከትልልቅ ሰዎች ጋራ አደባለከኝ 2x</a:t>
             </a:r>
           </a:p>
         </p:txBody>
@@ -4141,7 +4141,7 @@
                 <a:ea typeface="Ebrima"/>
                 <a:cs typeface="Ebrima"/>
               </a:rPr>
-              <a:t>ሰው ያደረከኝ አንተ ነህ ሰው ያደረከኝ (4x)</a:t>
+              <a:t>ሰው ያደረከኝ አንተ ነህ ሰው ያደረከኝ 4x</a:t>
             </a:r>
           </a:p>
         </p:txBody>
